--- a/semestral.pptx
+++ b/semestral.pptx
@@ -5,22 +5,24 @@
     <p:sldMasterId id="2147483746" r:id="rId1"/>
   </p:sldMasterIdLst>
   <p:notesMasterIdLst>
-    <p:notesMasterId r:id="rId12"/>
+    <p:notesMasterId r:id="rId14"/>
   </p:notesMasterIdLst>
   <p:handoutMasterIdLst>
-    <p:handoutMasterId r:id="rId13"/>
+    <p:handoutMasterId r:id="rId15"/>
   </p:handoutMasterIdLst>
   <p:sldIdLst>
     <p:sldId id="257" r:id="rId2"/>
-    <p:sldId id="259" r:id="rId3"/>
-    <p:sldId id="260" r:id="rId4"/>
-    <p:sldId id="261" r:id="rId5"/>
-    <p:sldId id="262" r:id="rId6"/>
-    <p:sldId id="263" r:id="rId7"/>
-    <p:sldId id="264" r:id="rId8"/>
-    <p:sldId id="265" r:id="rId9"/>
-    <p:sldId id="266" r:id="rId10"/>
-    <p:sldId id="267" r:id="rId11"/>
+    <p:sldId id="268" r:id="rId3"/>
+    <p:sldId id="259" r:id="rId4"/>
+    <p:sldId id="260" r:id="rId5"/>
+    <p:sldId id="261" r:id="rId6"/>
+    <p:sldId id="262" r:id="rId7"/>
+    <p:sldId id="263" r:id="rId8"/>
+    <p:sldId id="264" r:id="rId9"/>
+    <p:sldId id="265" r:id="rId10"/>
+    <p:sldId id="266" r:id="rId11"/>
+    <p:sldId id="267" r:id="rId12"/>
+    <p:sldId id="269" r:id="rId13"/>
   </p:sldIdLst>
   <p:sldSz cx="12192000" cy="6858000"/>
   <p:notesSz cx="6858000" cy="9144000"/>
@@ -2853,6 +2855,13 @@
             <a:schemeClr val="lt1"/>
           </a:fontRef>
         </p:style>
+        <p:txBody>
+          <a:bodyPr/>
+          <a:lstStyle/>
+          <a:p>
+            <a:endParaRPr lang="es-PA"/>
+          </a:p>
+        </p:txBody>
       </p:sp>
       <p:sp>
         <p:nvSpPr>
@@ -4572,6 +4581,158 @@
   <p:cSld>
     <p:spTree>
       <p:nvGrpSpPr>
+        <p:cNvPr id="1" name=""/>
+        <p:cNvGrpSpPr/>
+        <p:nvPr/>
+      </p:nvGrpSpPr>
+      <p:grpSpPr>
+        <a:xfrm>
+          <a:off x="0" y="0"/>
+          <a:ext cx="0" cy="0"/>
+          <a:chOff x="0" y="0"/>
+          <a:chExt cx="0" cy="0"/>
+        </a:xfrm>
+      </p:grpSpPr>
+      <p:sp>
+        <p:nvSpPr>
+          <p:cNvPr id="2" name="Título 1">
+            <a:extLst>
+              <a:ext uri="{FF2B5EF4-FFF2-40B4-BE49-F238E27FC236}">
+                <a16:creationId xmlns:a16="http://schemas.microsoft.com/office/drawing/2014/main" id="{A9835384-678E-7099-FA05-272972EEF36A}"/>
+              </a:ext>
+            </a:extLst>
+          </p:cNvPr>
+          <p:cNvSpPr>
+            <a:spLocks noGrp="1"/>
+          </p:cNvSpPr>
+          <p:nvPr>
+            <p:ph type="title"/>
+          </p:nvPr>
+        </p:nvSpPr>
+        <p:spPr/>
+        <p:txBody>
+          <a:bodyPr/>
+          <a:lstStyle/>
+          <a:p>
+            <a:r>
+              <a:rPr lang="es-PA" dirty="0"/>
+              <a:t>Favoritos</a:t>
+            </a:r>
+          </a:p>
+        </p:txBody>
+      </p:sp>
+      <p:pic>
+        <p:nvPicPr>
+          <p:cNvPr id="7" name="Marcador de contenido 6">
+            <a:extLst>
+              <a:ext uri="{FF2B5EF4-FFF2-40B4-BE49-F238E27FC236}">
+                <a16:creationId xmlns:a16="http://schemas.microsoft.com/office/drawing/2014/main" id="{63E5EB2E-57D3-483D-607F-AC8220499BD7}"/>
+              </a:ext>
+            </a:extLst>
+          </p:cNvPr>
+          <p:cNvPicPr>
+            <a:picLocks noGrp="1" noChangeAspect="1"/>
+          </p:cNvPicPr>
+          <p:nvPr>
+            <p:ph idx="1"/>
+          </p:nvPr>
+        </p:nvPicPr>
+        <p:blipFill>
+          <a:blip r:embed="rId2"/>
+          <a:stretch>
+            <a:fillRect/>
+          </a:stretch>
+        </p:blipFill>
+        <p:spPr>
+          <a:xfrm>
+            <a:off x="5459413" y="984297"/>
+            <a:ext cx="5927725" cy="4951319"/>
+          </a:xfrm>
+          <a:prstGeom prst="rect">
+            <a:avLst/>
+          </a:prstGeom>
+        </p:spPr>
+      </p:pic>
+      <p:sp>
+        <p:nvSpPr>
+          <p:cNvPr id="4" name="Marcador de texto 3">
+            <a:extLst>
+              <a:ext uri="{FF2B5EF4-FFF2-40B4-BE49-F238E27FC236}">
+                <a16:creationId xmlns:a16="http://schemas.microsoft.com/office/drawing/2014/main" id="{ECF798A6-46B9-D262-6794-FADCEDFE96B3}"/>
+              </a:ext>
+            </a:extLst>
+          </p:cNvPr>
+          <p:cNvSpPr>
+            <a:spLocks noGrp="1"/>
+          </p:cNvSpPr>
+          <p:nvPr>
+            <p:ph type="body" sz="half" idx="2"/>
+          </p:nvPr>
+        </p:nvSpPr>
+        <p:spPr/>
+        <p:txBody>
+          <a:bodyPr/>
+          <a:lstStyle/>
+          <a:p>
+            <a:r>
+              <a:rPr lang="es-PA" dirty="0" err="1"/>
+              <a:t>Select</a:t>
+            </a:r>
+            <a:r>
+              <a:rPr lang="es-PA" dirty="0"/>
+              <a:t> * desde la base de datos favoritos para mostrar en la pagina web</a:t>
+            </a:r>
+          </a:p>
+        </p:txBody>
+      </p:sp>
+      <p:sp>
+        <p:nvSpPr>
+          <p:cNvPr id="5" name="Marcador de fecha 4">
+            <a:extLst>
+              <a:ext uri="{FF2B5EF4-FFF2-40B4-BE49-F238E27FC236}">
+                <a16:creationId xmlns:a16="http://schemas.microsoft.com/office/drawing/2014/main" id="{E4799A73-3F8C-82C3-8513-19B1F17978C0}"/>
+              </a:ext>
+            </a:extLst>
+          </p:cNvPr>
+          <p:cNvSpPr>
+            <a:spLocks noGrp="1"/>
+          </p:cNvSpPr>
+          <p:nvPr>
+            <p:ph type="dt" sz="half" idx="10"/>
+          </p:nvPr>
+        </p:nvSpPr>
+        <p:spPr/>
+        <p:txBody>
+          <a:bodyPr/>
+          <a:lstStyle/>
+          <a:p>
+            <a:pPr rtl="0"/>
+            <a:fld id="{F3EBED02-4679-462C-830F-722888DF8E2D}" type="datetime1">
+              <a:rPr lang="es-ES" smtClean="0"/>
+              <a:t>16/12/2025</a:t>
+            </a:fld>
+            <a:endParaRPr lang="en-US" dirty="0"/>
+          </a:p>
+        </p:txBody>
+      </p:sp>
+    </p:spTree>
+    <p:extLst>
+      <p:ext uri="{BB962C8B-B14F-4D97-AF65-F5344CB8AC3E}">
+        <p14:creationId xmlns:p14="http://schemas.microsoft.com/office/powerpoint/2010/main" val="49182863"/>
+      </p:ext>
+    </p:extLst>
+  </p:cSld>
+  <p:clrMapOvr>
+    <a:masterClrMapping/>
+  </p:clrMapOvr>
+</p:sld>
+</file>
+
+<file path=ppt/slides/slide11.xml><?xml version="1.0" encoding="utf-8"?>
+<p:sld xmlns:a="http://schemas.openxmlformats.org/drawingml/2006/main" xmlns:r="http://schemas.openxmlformats.org/officeDocument/2006/relationships" xmlns:p="http://schemas.openxmlformats.org/presentationml/2006/main">
+  <p:cSld>
+    <p:spTree>
+      <p:nvGrpSpPr>
         <p:cNvPr id="1" name="">
           <a:extLst>
             <a:ext uri="{FF2B5EF4-FFF2-40B4-BE49-F238E27FC236}">
@@ -4747,6 +4908,126 @@
     <p:extLst>
       <p:ext uri="{BB962C8B-B14F-4D97-AF65-F5344CB8AC3E}">
         <p14:creationId xmlns:p14="http://schemas.microsoft.com/office/powerpoint/2010/main" val="585831585"/>
+      </p:ext>
+    </p:extLst>
+  </p:cSld>
+  <p:clrMapOvr>
+    <a:masterClrMapping/>
+  </p:clrMapOvr>
+</p:sld>
+</file>
+
+<file path=ppt/slides/slide12.xml><?xml version="1.0" encoding="utf-8"?>
+<p:sld xmlns:a="http://schemas.openxmlformats.org/drawingml/2006/main" xmlns:r="http://schemas.openxmlformats.org/officeDocument/2006/relationships" xmlns:p="http://schemas.openxmlformats.org/presentationml/2006/main">
+  <p:cSld>
+    <p:spTree>
+      <p:nvGrpSpPr>
+        <p:cNvPr id="1" name=""/>
+        <p:cNvGrpSpPr/>
+        <p:nvPr/>
+      </p:nvGrpSpPr>
+      <p:grpSpPr>
+        <a:xfrm>
+          <a:off x="0" y="0"/>
+          <a:ext cx="0" cy="0"/>
+          <a:chOff x="0" y="0"/>
+          <a:chExt cx="0" cy="0"/>
+        </a:xfrm>
+      </p:grpSpPr>
+      <p:sp>
+        <p:nvSpPr>
+          <p:cNvPr id="2" name="Marcador de fecha 1">
+            <a:extLst>
+              <a:ext uri="{FF2B5EF4-FFF2-40B4-BE49-F238E27FC236}">
+                <a16:creationId xmlns:a16="http://schemas.microsoft.com/office/drawing/2014/main" id="{61966CEB-66FA-DFCB-413F-B2630CAD0F42}"/>
+              </a:ext>
+            </a:extLst>
+          </p:cNvPr>
+          <p:cNvSpPr>
+            <a:spLocks noGrp="1"/>
+          </p:cNvSpPr>
+          <p:nvPr>
+            <p:ph type="dt" sz="half" idx="10"/>
+          </p:nvPr>
+        </p:nvSpPr>
+        <p:spPr/>
+        <p:txBody>
+          <a:bodyPr/>
+          <a:lstStyle/>
+          <a:p>
+            <a:pPr rtl="0"/>
+            <a:fld id="{9B572A2E-2D1F-4CE9-8283-32B623FD9550}" type="datetime1">
+              <a:rPr lang="es-ES" smtClean="0"/>
+              <a:t>16/12/2025</a:t>
+            </a:fld>
+            <a:endParaRPr lang="en-US" dirty="0"/>
+          </a:p>
+        </p:txBody>
+      </p:sp>
+      <p:pic>
+        <p:nvPicPr>
+          <p:cNvPr id="4" name="Imagen 3">
+            <a:extLst>
+              <a:ext uri="{FF2B5EF4-FFF2-40B4-BE49-F238E27FC236}">
+                <a16:creationId xmlns:a16="http://schemas.microsoft.com/office/drawing/2014/main" id="{138C9D39-5A5E-B363-6556-0E2756A028DC}"/>
+              </a:ext>
+            </a:extLst>
+          </p:cNvPr>
+          <p:cNvPicPr>
+            <a:picLocks noChangeAspect="1"/>
+          </p:cNvPicPr>
+          <p:nvPr/>
+        </p:nvPicPr>
+        <p:blipFill>
+          <a:blip r:embed="rId2"/>
+          <a:stretch>
+            <a:fillRect/>
+          </a:stretch>
+        </p:blipFill>
+        <p:spPr>
+          <a:xfrm>
+            <a:off x="0" y="0"/>
+            <a:ext cx="6524026" cy="3457817"/>
+          </a:xfrm>
+          <a:prstGeom prst="rect">
+            <a:avLst/>
+          </a:prstGeom>
+        </p:spPr>
+      </p:pic>
+      <p:pic>
+        <p:nvPicPr>
+          <p:cNvPr id="6" name="Imagen 5">
+            <a:extLst>
+              <a:ext uri="{FF2B5EF4-FFF2-40B4-BE49-F238E27FC236}">
+                <a16:creationId xmlns:a16="http://schemas.microsoft.com/office/drawing/2014/main" id="{F4AD1E1A-153F-16AB-2063-CE91CDCB7BD3}"/>
+              </a:ext>
+            </a:extLst>
+          </p:cNvPr>
+          <p:cNvPicPr>
+            <a:picLocks noChangeAspect="1"/>
+          </p:cNvPicPr>
+          <p:nvPr/>
+        </p:nvPicPr>
+        <p:blipFill>
+          <a:blip r:embed="rId3"/>
+          <a:stretch>
+            <a:fillRect/>
+          </a:stretch>
+        </p:blipFill>
+        <p:spPr>
+          <a:xfrm>
+            <a:off x="0" y="4375219"/>
+            <a:ext cx="11217612" cy="1966130"/>
+          </a:xfrm>
+          <a:prstGeom prst="rect">
+            <a:avLst/>
+          </a:prstGeom>
+        </p:spPr>
+      </p:pic>
+    </p:spTree>
+    <p:extLst>
+      <p:ext uri="{BB962C8B-B14F-4D97-AF65-F5344CB8AC3E}">
+        <p14:creationId xmlns:p14="http://schemas.microsoft.com/office/powerpoint/2010/main" val="3329958588"/>
       </p:ext>
     </p:extLst>
   </p:cSld>
@@ -4775,121 +5056,85 @@
       </p:grpSpPr>
       <p:sp>
         <p:nvSpPr>
-          <p:cNvPr id="34" name="Title 1">
-            <a:extLst>
-              <a:ext uri="{FF2B5EF4-FFF2-40B4-BE49-F238E27FC236}">
-                <a16:creationId xmlns:a16="http://schemas.microsoft.com/office/drawing/2014/main" id="{AA9B89DB-9A21-4CD0-C803-EEDA70FE88C9}"/>
-              </a:ext>
-            </a:extLst>
-          </p:cNvPr>
-          <p:cNvSpPr>
-            <a:spLocks noGrp="1"/>
-          </p:cNvSpPr>
-          <p:nvPr>
-            <p:ph type="title"/>
-          </p:nvPr>
-        </p:nvSpPr>
-        <p:spPr>
-          <a:xfrm>
-            <a:off x="1097280" y="286603"/>
-            <a:ext cx="10058400" cy="1450757"/>
-          </a:xfrm>
-        </p:spPr>
+          <p:cNvPr id="2" name="Marcador de fecha 1">
+            <a:extLst>
+              <a:ext uri="{FF2B5EF4-FFF2-40B4-BE49-F238E27FC236}">
+                <a16:creationId xmlns:a16="http://schemas.microsoft.com/office/drawing/2014/main" id="{C04D2B8C-85E6-EA01-9D8F-486E392CAF7C}"/>
+              </a:ext>
+            </a:extLst>
+          </p:cNvPr>
+          <p:cNvSpPr>
+            <a:spLocks noGrp="1"/>
+          </p:cNvSpPr>
+          <p:nvPr>
+            <p:ph type="dt" sz="half" idx="10"/>
+          </p:nvPr>
+        </p:nvSpPr>
+        <p:spPr/>
         <p:txBody>
           <a:bodyPr/>
           <a:lstStyle/>
           <a:p>
-            <a:r>
-              <a:rPr lang="en-US" dirty="0" err="1"/>
-              <a:t>Buscador</a:t>
-            </a:r>
+            <a:pPr rtl="0"/>
+            <a:fld id="{9B572A2E-2D1F-4CE9-8283-32B623FD9550}" type="datetime1">
+              <a:rPr lang="es-ES" smtClean="0"/>
+              <a:t>16/12/2025</a:t>
+            </a:fld>
             <a:endParaRPr lang="en-US" dirty="0"/>
           </a:p>
         </p:txBody>
       </p:sp>
       <p:pic>
         <p:nvPicPr>
-          <p:cNvPr id="15" name="Marcador de posición de imagen 14">
-            <a:extLst>
-              <a:ext uri="{FF2B5EF4-FFF2-40B4-BE49-F238E27FC236}">
-                <a16:creationId xmlns:a16="http://schemas.microsoft.com/office/drawing/2014/main" id="{B7ABEF20-8C57-21E6-5271-28D5C9672F7C}"/>
+          <p:cNvPr id="1026" name="Picture 2">
+            <a:extLst>
+              <a:ext uri="{FF2B5EF4-FFF2-40B4-BE49-F238E27FC236}">
+                <a16:creationId xmlns:a16="http://schemas.microsoft.com/office/drawing/2014/main" id="{17C2D4CA-1E39-72D8-19AF-6E2431956996}"/>
               </a:ext>
             </a:extLst>
           </p:cNvPr>
           <p:cNvPicPr>
-            <a:picLocks noGrp="1" noChangeAspect="1"/>
+            <a:picLocks noChangeAspect="1" noChangeArrowheads="1"/>
           </p:cNvPicPr>
-          <p:nvPr>
-            <p:ph idx="1"/>
-          </p:nvPr>
+          <p:nvPr/>
         </p:nvPicPr>
         <p:blipFill>
-          <a:blip r:embed="rId2"/>
+          <a:blip r:embed="rId2">
+            <a:extLst>
+              <a:ext uri="{28A0092B-C50C-407E-A947-70E740481C1C}">
+                <a14:useLocalDpi xmlns:a14="http://schemas.microsoft.com/office/drawing/2010/main" val="0"/>
+              </a:ext>
+            </a:extLst>
+          </a:blip>
+          <a:srcRect/>
           <a:stretch>
             <a:fillRect/>
           </a:stretch>
         </p:blipFill>
-        <p:spPr>
-          <a:xfrm>
-            <a:off x="1097280" y="2618189"/>
-            <a:ext cx="10058400" cy="2740914"/>
+        <p:spPr bwMode="auto">
+          <a:xfrm>
+            <a:off x="339725" y="0"/>
+            <a:ext cx="11510963" cy="6858000"/>
           </a:xfrm>
           <a:prstGeom prst="rect">
             <a:avLst/>
           </a:prstGeom>
           <a:noFill/>
+          <a:extLst>
+            <a:ext uri="{909E8E84-426E-40DD-AFC4-6F175D3DCCD1}">
+              <a14:hiddenFill xmlns:a14="http://schemas.microsoft.com/office/drawing/2010/main">
+                <a:solidFill>
+                  <a:srgbClr val="FFFFFF"/>
+                </a:solidFill>
+              </a14:hiddenFill>
+            </a:ext>
+          </a:extLst>
         </p:spPr>
       </p:pic>
-      <p:sp>
-        <p:nvSpPr>
-          <p:cNvPr id="5" name="Marcador de fecha 4">
-            <a:extLst>
-              <a:ext uri="{FF2B5EF4-FFF2-40B4-BE49-F238E27FC236}">
-                <a16:creationId xmlns:a16="http://schemas.microsoft.com/office/drawing/2014/main" id="{BA45991F-16E8-2544-F0AE-0FCD61AF3D69}"/>
-              </a:ext>
-            </a:extLst>
-          </p:cNvPr>
-          <p:cNvSpPr>
-            <a:spLocks noGrp="1"/>
-          </p:cNvSpPr>
-          <p:nvPr>
-            <p:ph type="dt" sz="half" idx="10"/>
-          </p:nvPr>
-        </p:nvSpPr>
-        <p:spPr>
-          <a:xfrm>
-            <a:off x="8218426" y="6446838"/>
-            <a:ext cx="2584850" cy="365125"/>
-          </a:xfrm>
-        </p:spPr>
-        <p:txBody>
-          <a:bodyPr anchor="ctr">
-            <a:normAutofit/>
-          </a:bodyPr>
-          <a:lstStyle/>
-          <a:p>
-            <a:pPr rtl="0">
-              <a:spcAft>
-                <a:spcPts val="600"/>
-              </a:spcAft>
-            </a:pPr>
-            <a:fld id="{EB264D6B-F770-42EA-A416-77765C2D9E77}" type="datetime1">
-              <a:rPr lang="es-ES" smtClean="0"/>
-              <a:pPr rtl="0">
-                <a:spcAft>
-                  <a:spcPts val="600"/>
-                </a:spcAft>
-              </a:pPr>
-              <a:t>16/12/2025</a:t>
-            </a:fld>
-            <a:endParaRPr lang="en-US"/>
-          </a:p>
-        </p:txBody>
-      </p:sp>
     </p:spTree>
     <p:extLst>
       <p:ext uri="{BB962C8B-B14F-4D97-AF65-F5344CB8AC3E}">
-        <p14:creationId xmlns:p14="http://schemas.microsoft.com/office/powerpoint/2010/main" val="2511444044"/>
+        <p14:creationId xmlns:p14="http://schemas.microsoft.com/office/powerpoint/2010/main" val="57352704"/>
       </p:ext>
     </p:extLst>
   </p:cSld>
@@ -4918,10 +5163,10 @@
       </p:grpSpPr>
       <p:sp>
         <p:nvSpPr>
-          <p:cNvPr id="11" name="Title 1">
-            <a:extLst>
-              <a:ext uri="{FF2B5EF4-FFF2-40B4-BE49-F238E27FC236}">
-                <a16:creationId xmlns:a16="http://schemas.microsoft.com/office/drawing/2014/main" id="{8AD86DCB-3561-4F76-D46A-BAD52E5C581B}"/>
+          <p:cNvPr id="34" name="Title 1">
+            <a:extLst>
+              <a:ext uri="{FF2B5EF4-FFF2-40B4-BE49-F238E27FC236}">
+                <a16:creationId xmlns:a16="http://schemas.microsoft.com/office/drawing/2014/main" id="{AA9B89DB-9A21-4CD0-C803-EEDA70FE88C9}"/>
               </a:ext>
             </a:extLst>
           </p:cNvPr>
@@ -4944,7 +5189,7 @@
           <a:p>
             <a:r>
               <a:rPr lang="en-US" dirty="0" err="1"/>
-              <a:t>Favoritos</a:t>
+              <a:t>Buscador</a:t>
             </a:r>
             <a:endParaRPr lang="en-US" dirty="0"/>
           </a:p>
@@ -4952,17 +5197,19 @@
       </p:sp>
       <p:pic>
         <p:nvPicPr>
-          <p:cNvPr id="6" name="Imagen 5">
-            <a:extLst>
-              <a:ext uri="{FF2B5EF4-FFF2-40B4-BE49-F238E27FC236}">
-                <a16:creationId xmlns:a16="http://schemas.microsoft.com/office/drawing/2014/main" id="{A9640E74-6D89-1EA7-F227-E6B9503E363D}"/>
+          <p:cNvPr id="15" name="Marcador de posición de imagen 14">
+            <a:extLst>
+              <a:ext uri="{FF2B5EF4-FFF2-40B4-BE49-F238E27FC236}">
+                <a16:creationId xmlns:a16="http://schemas.microsoft.com/office/drawing/2014/main" id="{B7ABEF20-8C57-21E6-5271-28D5C9672F7C}"/>
               </a:ext>
             </a:extLst>
           </p:cNvPr>
           <p:cNvPicPr>
-            <a:picLocks noChangeAspect="1"/>
+            <a:picLocks noGrp="1" noChangeAspect="1"/>
           </p:cNvPicPr>
-          <p:nvPr/>
+          <p:nvPr>
+            <p:ph idx="1"/>
+          </p:nvPr>
         </p:nvPicPr>
         <p:blipFill>
           <a:blip r:embed="rId2"/>
@@ -4972,8 +5219,8 @@
         </p:blipFill>
         <p:spPr>
           <a:xfrm>
-            <a:off x="3430501" y="2108201"/>
-            <a:ext cx="5391958" cy="3760891"/>
+            <a:off x="1097280" y="2618189"/>
+            <a:ext cx="10058400" cy="2740914"/>
           </a:xfrm>
           <a:prstGeom prst="rect">
             <a:avLst/>
@@ -4983,10 +5230,10 @@
       </p:pic>
       <p:sp>
         <p:nvSpPr>
-          <p:cNvPr id="4" name="Marcador de fecha 3">
-            <a:extLst>
-              <a:ext uri="{FF2B5EF4-FFF2-40B4-BE49-F238E27FC236}">
-                <a16:creationId xmlns:a16="http://schemas.microsoft.com/office/drawing/2014/main" id="{16FF393D-DE63-48B1-EE38-D5E86A6A6760}"/>
+          <p:cNvPr id="5" name="Marcador de fecha 4">
+            <a:extLst>
+              <a:ext uri="{FF2B5EF4-FFF2-40B4-BE49-F238E27FC236}">
+                <a16:creationId xmlns:a16="http://schemas.microsoft.com/office/drawing/2014/main" id="{BA45991F-16E8-2544-F0AE-0FCD61AF3D69}"/>
               </a:ext>
             </a:extLst>
           </p:cNvPr>
@@ -5014,7 +5261,7 @@
                 <a:spcPts val="600"/>
               </a:spcAft>
             </a:pPr>
-            <a:fld id="{DFBDD6E0-AD8D-45E4-AD9F-19818203D7BD}" type="datetime1">
+            <a:fld id="{EB264D6B-F770-42EA-A416-77765C2D9E77}" type="datetime1">
               <a:rPr lang="es-ES" smtClean="0"/>
               <a:pPr rtl="0">
                 <a:spcAft>
@@ -5030,7 +5277,7 @@
     </p:spTree>
     <p:extLst>
       <p:ext uri="{BB962C8B-B14F-4D97-AF65-F5344CB8AC3E}">
-        <p14:creationId xmlns:p14="http://schemas.microsoft.com/office/powerpoint/2010/main" val="3781757382"/>
+        <p14:creationId xmlns:p14="http://schemas.microsoft.com/office/powerpoint/2010/main" val="2511444044"/>
       </p:ext>
     </p:extLst>
   </p:cSld>
@@ -5059,10 +5306,10 @@
       </p:grpSpPr>
       <p:sp>
         <p:nvSpPr>
-          <p:cNvPr id="12" name="Title 1">
-            <a:extLst>
-              <a:ext uri="{FF2B5EF4-FFF2-40B4-BE49-F238E27FC236}">
-                <a16:creationId xmlns:a16="http://schemas.microsoft.com/office/drawing/2014/main" id="{63F2C4B4-3E58-1F98-2148-0FF6BB482703}"/>
+          <p:cNvPr id="11" name="Title 1">
+            <a:extLst>
+              <a:ext uri="{FF2B5EF4-FFF2-40B4-BE49-F238E27FC236}">
+                <a16:creationId xmlns:a16="http://schemas.microsoft.com/office/drawing/2014/main" id="{8AD86DCB-3561-4F76-D46A-BAD52E5C581B}"/>
               </a:ext>
             </a:extLst>
           </p:cNvPr>
@@ -5075,8 +5322,8 @@
         </p:nvSpPr>
         <p:spPr>
           <a:xfrm>
-            <a:off x="643466" y="786383"/>
-            <a:ext cx="3517567" cy="2093975"/>
+            <a:off x="1097280" y="286603"/>
+            <a:ext cx="10058400" cy="1450757"/>
           </a:xfrm>
         </p:spPr>
         <p:txBody>
@@ -5085,42 +5332,36 @@
           <a:p>
             <a:r>
               <a:rPr lang="en-US" dirty="0" err="1"/>
-              <a:t>Pagina</a:t>
-            </a:r>
-            <a:r>
-              <a:rPr lang="en-US" dirty="0"/>
-              <a:t> principal</a:t>
-            </a:r>
+              <a:t>Favoritos</a:t>
+            </a:r>
+            <a:endParaRPr lang="en-US" dirty="0"/>
           </a:p>
         </p:txBody>
       </p:sp>
       <p:pic>
         <p:nvPicPr>
-          <p:cNvPr id="7" name="Marcador de posición de imagen 6">
-            <a:extLst>
-              <a:ext uri="{FF2B5EF4-FFF2-40B4-BE49-F238E27FC236}">
-                <a16:creationId xmlns:a16="http://schemas.microsoft.com/office/drawing/2014/main" id="{D4A82309-4FBC-20E0-7AFE-ACCBBD34B4FA}"/>
+          <p:cNvPr id="6" name="Imagen 5">
+            <a:extLst>
+              <a:ext uri="{FF2B5EF4-FFF2-40B4-BE49-F238E27FC236}">
+                <a16:creationId xmlns:a16="http://schemas.microsoft.com/office/drawing/2014/main" id="{A9640E74-6D89-1EA7-F227-E6B9503E363D}"/>
               </a:ext>
             </a:extLst>
           </p:cNvPr>
           <p:cNvPicPr>
-            <a:picLocks noGrp="1" noChangeAspect="1"/>
+            <a:picLocks noChangeAspect="1"/>
           </p:cNvPicPr>
-          <p:nvPr>
-            <p:ph idx="1"/>
-          </p:nvPr>
+          <p:nvPr/>
         </p:nvPicPr>
         <p:blipFill>
           <a:blip r:embed="rId2"/>
-          <a:srcRect r="30021"/>
           <a:stretch>
             <a:fillRect/>
           </a:stretch>
         </p:blipFill>
         <p:spPr>
           <a:xfrm>
-            <a:off x="5458984" y="812799"/>
-            <a:ext cx="5928344" cy="5294757"/>
+            <a:off x="3430501" y="2108201"/>
+            <a:ext cx="5391958" cy="3760891"/>
           </a:xfrm>
           <a:prstGeom prst="rect">
             <a:avLst/>
@@ -5130,51 +5371,10 @@
       </p:pic>
       <p:sp>
         <p:nvSpPr>
-          <p:cNvPr id="14" name="Text Placeholder 3">
-            <a:extLst>
-              <a:ext uri="{FF2B5EF4-FFF2-40B4-BE49-F238E27FC236}">
-                <a16:creationId xmlns:a16="http://schemas.microsoft.com/office/drawing/2014/main" id="{BC29057F-BB6D-61E5-ED6E-8A8F8EB9936F}"/>
-              </a:ext>
-            </a:extLst>
-          </p:cNvPr>
-          <p:cNvSpPr>
-            <a:spLocks noGrp="1"/>
-          </p:cNvSpPr>
-          <p:nvPr>
-            <p:ph type="body" sz="half" idx="2"/>
-          </p:nvPr>
-        </p:nvSpPr>
-        <p:spPr>
-          <a:xfrm>
-            <a:off x="643465" y="3043050"/>
-            <a:ext cx="3517567" cy="3064505"/>
-          </a:xfrm>
-        </p:spPr>
-        <p:txBody>
-          <a:bodyPr/>
-          <a:lstStyle/>
-          <a:p>
-            <a:r>
-              <a:rPr lang="en-US" dirty="0"/>
-              <a:t>Html de la </a:t>
-            </a:r>
-            <a:r>
-              <a:rPr lang="en-US" dirty="0" err="1"/>
-              <a:t>pagina</a:t>
-            </a:r>
-            <a:r>
-              <a:rPr lang="en-US" dirty="0"/>
-              <a:t> principal</a:t>
-            </a:r>
-          </a:p>
-        </p:txBody>
-      </p:sp>
-      <p:sp>
-        <p:nvSpPr>
-          <p:cNvPr id="5" name="Marcador de fecha 4">
-            <a:extLst>
-              <a:ext uri="{FF2B5EF4-FFF2-40B4-BE49-F238E27FC236}">
-                <a16:creationId xmlns:a16="http://schemas.microsoft.com/office/drawing/2014/main" id="{B5751992-0661-F58A-67B2-5C03CE7160FD}"/>
+          <p:cNvPr id="4" name="Marcador de fecha 3">
+            <a:extLst>
+              <a:ext uri="{FF2B5EF4-FFF2-40B4-BE49-F238E27FC236}">
+                <a16:creationId xmlns:a16="http://schemas.microsoft.com/office/drawing/2014/main" id="{16FF393D-DE63-48B1-EE38-D5E86A6A6760}"/>
               </a:ext>
             </a:extLst>
           </p:cNvPr>
@@ -5187,8 +5387,8 @@
         </p:nvSpPr>
         <p:spPr>
           <a:xfrm>
-            <a:off x="643464" y="6446520"/>
-            <a:ext cx="3517568" cy="365125"/>
+            <a:off x="8218426" y="6446838"/>
+            <a:ext cx="2584850" cy="365125"/>
           </a:xfrm>
         </p:spPr>
         <p:txBody>
@@ -5202,7 +5402,7 @@
                 <a:spcPts val="600"/>
               </a:spcAft>
             </a:pPr>
-            <a:fld id="{EB264D6B-F770-42EA-A416-77765C2D9E77}" type="datetime1">
+            <a:fld id="{DFBDD6E0-AD8D-45E4-AD9F-19818203D7BD}" type="datetime1">
               <a:rPr lang="es-ES" smtClean="0"/>
               <a:pPr rtl="0">
                 <a:spcAft>
@@ -5218,7 +5418,7 @@
     </p:spTree>
     <p:extLst>
       <p:ext uri="{BB962C8B-B14F-4D97-AF65-F5344CB8AC3E}">
-        <p14:creationId xmlns:p14="http://schemas.microsoft.com/office/powerpoint/2010/main" val="2770469672"/>
+        <p14:creationId xmlns:p14="http://schemas.microsoft.com/office/powerpoint/2010/main" val="3781757382"/>
       </p:ext>
     </p:extLst>
   </p:cSld>
@@ -5250,7 +5450,7 @@
           <p:cNvPr id="12" name="Title 1">
             <a:extLst>
               <a:ext uri="{FF2B5EF4-FFF2-40B4-BE49-F238E27FC236}">
-                <a16:creationId xmlns:a16="http://schemas.microsoft.com/office/drawing/2014/main" id="{4927495B-63EF-0776-263C-3F0EEAD643ED}"/>
+                <a16:creationId xmlns:a16="http://schemas.microsoft.com/office/drawing/2014/main" id="{63F2C4B4-3E58-1F98-2148-0FF6BB482703}"/>
               </a:ext>
             </a:extLst>
           </p:cNvPr>
@@ -5263,116 +5463,31 @@
         </p:nvSpPr>
         <p:spPr>
           <a:xfrm>
-            <a:off x="1165374" y="271526"/>
-            <a:ext cx="10058400" cy="736283"/>
+            <a:off x="643466" y="786383"/>
+            <a:ext cx="3517567" cy="2093975"/>
           </a:xfrm>
         </p:spPr>
         <p:txBody>
           <a:bodyPr/>
           <a:lstStyle/>
           <a:p>
-            <a:endParaRPr lang="en-US" dirty="0"/>
-          </a:p>
-        </p:txBody>
-      </p:sp>
-      <p:sp>
-        <p:nvSpPr>
-          <p:cNvPr id="14" name="Text Placeholder 2">
-            <a:extLst>
-              <a:ext uri="{FF2B5EF4-FFF2-40B4-BE49-F238E27FC236}">
-                <a16:creationId xmlns:a16="http://schemas.microsoft.com/office/drawing/2014/main" id="{9FB6AFA1-35BD-1F5F-E597-0CAD07789EDE}"/>
-              </a:ext>
-            </a:extLst>
-          </p:cNvPr>
-          <p:cNvSpPr>
-            <a:spLocks noGrp="1"/>
-          </p:cNvSpPr>
-          <p:nvPr>
-            <p:ph type="body" idx="1"/>
-          </p:nvPr>
-        </p:nvSpPr>
-        <p:spPr>
-          <a:xfrm>
-            <a:off x="1097280" y="2057400"/>
-            <a:ext cx="4639736" cy="736282"/>
-          </a:xfrm>
-        </p:spPr>
-        <p:txBody>
-          <a:bodyPr>
-            <a:noAutofit/>
-          </a:bodyPr>
-          <a:lstStyle/>
-          <a:p>
-            <a:r>
-              <a:rPr lang="en-US" sz="1800" dirty="0" err="1"/>
-              <a:t>Boton</a:t>
-            </a:r>
-            <a:r>
-              <a:rPr lang="en-US" sz="1800" dirty="0"/>
-              <a:t> </a:t>
-            </a:r>
-            <a:r>
-              <a:rPr lang="en-US" sz="1800" dirty="0" err="1"/>
-              <a:t>Buscar</a:t>
-            </a:r>
-            <a:r>
-              <a:rPr lang="en-US" sz="1800" dirty="0"/>
-              <a:t>:  lee </a:t>
-            </a:r>
-            <a:r>
-              <a:rPr lang="en-US" sz="1800" dirty="0" err="1"/>
-              <a:t>el</a:t>
-            </a:r>
-            <a:r>
-              <a:rPr lang="en-US" sz="1800" dirty="0"/>
-              <a:t> </a:t>
-            </a:r>
-            <a:r>
-              <a:rPr lang="en-US" sz="1800" dirty="0" err="1"/>
-              <a:t>texto</a:t>
-            </a:r>
-            <a:r>
-              <a:rPr lang="en-US" sz="1800" dirty="0"/>
-              <a:t> del textbox de la </a:t>
-            </a:r>
-            <a:r>
-              <a:rPr lang="en-US" sz="1800" dirty="0" err="1"/>
-              <a:t>pagina</a:t>
-            </a:r>
-            <a:r>
-              <a:rPr lang="en-US" sz="1800" dirty="0"/>
-              <a:t> principal y lo </a:t>
-            </a:r>
-            <a:r>
-              <a:rPr lang="en-US" sz="1800" dirty="0" err="1"/>
-              <a:t>reedirige</a:t>
-            </a:r>
-            <a:r>
-              <a:rPr lang="en-US" sz="1800" dirty="0"/>
-              <a:t> a la </a:t>
-            </a:r>
-            <a:r>
-              <a:rPr lang="en-US" sz="1800" dirty="0" err="1"/>
-              <a:t>pagina</a:t>
-            </a:r>
-            <a:r>
-              <a:rPr lang="en-US" sz="1800" dirty="0"/>
-              <a:t> de </a:t>
-            </a:r>
-            <a:r>
-              <a:rPr lang="en-US" sz="1800" dirty="0" err="1"/>
-              <a:t>pelicula</a:t>
-            </a:r>
-            <a:endParaRPr lang="en-US" sz="1800" dirty="0"/>
+            <a:r>
+              <a:rPr lang="en-US" dirty="0" err="1"/>
+              <a:t>Pagina</a:t>
+            </a:r>
+            <a:r>
+              <a:rPr lang="en-US" dirty="0"/>
+              <a:t> principal</a:t>
+            </a:r>
           </a:p>
         </p:txBody>
       </p:sp>
       <p:pic>
         <p:nvPicPr>
-          <p:cNvPr id="9" name="Marcador de contenido 8">
-            <a:extLst>
-              <a:ext uri="{FF2B5EF4-FFF2-40B4-BE49-F238E27FC236}">
-                <a16:creationId xmlns:a16="http://schemas.microsoft.com/office/drawing/2014/main" id="{D0667CB9-D9A2-163C-F533-8AE7DEAEAAB3}"/>
+          <p:cNvPr id="7" name="Marcador de posición de imagen 6">
+            <a:extLst>
+              <a:ext uri="{FF2B5EF4-FFF2-40B4-BE49-F238E27FC236}">
+                <a16:creationId xmlns:a16="http://schemas.microsoft.com/office/drawing/2014/main" id="{D4A82309-4FBC-20E0-7AFE-ACCBBD34B4FA}"/>
               </a:ext>
             </a:extLst>
           </p:cNvPr>
@@ -5380,89 +5495,20 @@
             <a:picLocks noGrp="1" noChangeAspect="1"/>
           </p:cNvPicPr>
           <p:nvPr>
-            <p:ph sz="half" idx="2"/>
+            <p:ph idx="1"/>
           </p:nvPr>
         </p:nvPicPr>
         <p:blipFill>
           <a:blip r:embed="rId2"/>
+          <a:srcRect r="30021"/>
           <a:stretch>
             <a:fillRect/>
           </a:stretch>
         </p:blipFill>
         <p:spPr>
           <a:xfrm>
-            <a:off x="0" y="3210129"/>
-            <a:ext cx="6254885" cy="2548646"/>
-          </a:xfrm>
-          <a:prstGeom prst="rect">
-            <a:avLst/>
-          </a:prstGeom>
-        </p:spPr>
-      </p:pic>
-      <p:sp>
-        <p:nvSpPr>
-          <p:cNvPr id="18" name="Text Placeholder 4">
-            <a:extLst>
-              <a:ext uri="{FF2B5EF4-FFF2-40B4-BE49-F238E27FC236}">
-                <a16:creationId xmlns:a16="http://schemas.microsoft.com/office/drawing/2014/main" id="{8B1D359C-6544-9783-F86D-64B956AFE760}"/>
-              </a:ext>
-            </a:extLst>
-          </p:cNvPr>
-          <p:cNvSpPr>
-            <a:spLocks noGrp="1"/>
-          </p:cNvSpPr>
-          <p:nvPr>
-            <p:ph type="body" sz="quarter" idx="3"/>
-          </p:nvPr>
-        </p:nvSpPr>
-        <p:spPr>
-          <a:xfrm>
-            <a:off x="6515944" y="2057400"/>
-            <a:ext cx="3513273" cy="900874"/>
-          </a:xfrm>
-        </p:spPr>
-        <p:txBody>
-          <a:bodyPr>
-            <a:normAutofit fontScale="32500" lnSpcReduction="20000"/>
-          </a:bodyPr>
-          <a:lstStyle/>
-          <a:p>
-            <a:r>
-              <a:rPr lang="es-MX" sz="4900" dirty="0"/>
-              <a:t>Cada método Llama a una API, Genera HTML, Inserta imágenes, Guarda en la BD</a:t>
-            </a:r>
-          </a:p>
-          <a:p>
-            <a:endParaRPr lang="en-US" dirty="0"/>
-          </a:p>
-        </p:txBody>
-      </p:sp>
-      <p:pic>
-        <p:nvPicPr>
-          <p:cNvPr id="7" name="Marcador de contenido 6">
-            <a:extLst>
-              <a:ext uri="{FF2B5EF4-FFF2-40B4-BE49-F238E27FC236}">
-                <a16:creationId xmlns:a16="http://schemas.microsoft.com/office/drawing/2014/main" id="{1DB6497D-95E8-2657-3F7A-BF4F7A9565AD}"/>
-              </a:ext>
-            </a:extLst>
-          </p:cNvPr>
-          <p:cNvPicPr>
-            <a:picLocks noGrp="1" noChangeAspect="1"/>
-          </p:cNvPicPr>
-          <p:nvPr>
-            <p:ph sz="quarter" idx="4"/>
-          </p:nvPr>
-        </p:nvPicPr>
-        <p:blipFill>
-          <a:blip r:embed="rId3"/>
-          <a:stretch>
-            <a:fillRect/>
-          </a:stretch>
-        </p:blipFill>
-        <p:spPr>
-          <a:xfrm>
-            <a:off x="6454984" y="2958274"/>
-            <a:ext cx="4639736" cy="2725844"/>
+            <a:off x="5458984" y="812799"/>
+            <a:ext cx="5928344" cy="5294757"/>
           </a:xfrm>
           <a:prstGeom prst="rect">
             <a:avLst/>
@@ -5472,10 +5518,51 @@
       </p:pic>
       <p:sp>
         <p:nvSpPr>
+          <p:cNvPr id="14" name="Text Placeholder 3">
+            <a:extLst>
+              <a:ext uri="{FF2B5EF4-FFF2-40B4-BE49-F238E27FC236}">
+                <a16:creationId xmlns:a16="http://schemas.microsoft.com/office/drawing/2014/main" id="{BC29057F-BB6D-61E5-ED6E-8A8F8EB9936F}"/>
+              </a:ext>
+            </a:extLst>
+          </p:cNvPr>
+          <p:cNvSpPr>
+            <a:spLocks noGrp="1"/>
+          </p:cNvSpPr>
+          <p:nvPr>
+            <p:ph type="body" sz="half" idx="2"/>
+          </p:nvPr>
+        </p:nvSpPr>
+        <p:spPr>
+          <a:xfrm>
+            <a:off x="643465" y="3043050"/>
+            <a:ext cx="3517567" cy="3064505"/>
+          </a:xfrm>
+        </p:spPr>
+        <p:txBody>
+          <a:bodyPr/>
+          <a:lstStyle/>
+          <a:p>
+            <a:r>
+              <a:rPr lang="en-US" dirty="0"/>
+              <a:t>Html de la </a:t>
+            </a:r>
+            <a:r>
+              <a:rPr lang="en-US" dirty="0" err="1"/>
+              <a:t>pagina</a:t>
+            </a:r>
+            <a:r>
+              <a:rPr lang="en-US" dirty="0"/>
+              <a:t> principal</a:t>
+            </a:r>
+          </a:p>
+        </p:txBody>
+      </p:sp>
+      <p:sp>
+        <p:nvSpPr>
           <p:cNvPr id="5" name="Marcador de fecha 4">
             <a:extLst>
               <a:ext uri="{FF2B5EF4-FFF2-40B4-BE49-F238E27FC236}">
-                <a16:creationId xmlns:a16="http://schemas.microsoft.com/office/drawing/2014/main" id="{E53BC21D-331B-977F-992F-2887BD71285D}"/>
+                <a16:creationId xmlns:a16="http://schemas.microsoft.com/office/drawing/2014/main" id="{B5751992-0661-F58A-67B2-5C03CE7160FD}"/>
               </a:ext>
             </a:extLst>
           </p:cNvPr>
@@ -5488,8 +5575,8 @@
         </p:nvSpPr>
         <p:spPr>
           <a:xfrm>
-            <a:off x="8218426" y="6446838"/>
-            <a:ext cx="2584850" cy="365125"/>
+            <a:off x="643464" y="6446520"/>
+            <a:ext cx="3517568" cy="365125"/>
           </a:xfrm>
         </p:spPr>
         <p:txBody>
@@ -5503,7 +5590,7 @@
                 <a:spcPts val="600"/>
               </a:spcAft>
             </a:pPr>
-            <a:fld id="{4E289539-2F87-43AF-8A5D-E992DCF9F593}" type="datetime1">
+            <a:fld id="{EB264D6B-F770-42EA-A416-77765C2D9E77}" type="datetime1">
               <a:rPr lang="es-ES" smtClean="0"/>
               <a:pPr rtl="0">
                 <a:spcAft>
@@ -5519,7 +5606,7 @@
     </p:spTree>
     <p:extLst>
       <p:ext uri="{BB962C8B-B14F-4D97-AF65-F5344CB8AC3E}">
-        <p14:creationId xmlns:p14="http://schemas.microsoft.com/office/powerpoint/2010/main" val="2730147275"/>
+        <p14:creationId xmlns:p14="http://schemas.microsoft.com/office/powerpoint/2010/main" val="2770469672"/>
       </p:ext>
     </p:extLst>
   </p:cSld>
@@ -5548,10 +5635,10 @@
       </p:grpSpPr>
       <p:sp>
         <p:nvSpPr>
-          <p:cNvPr id="2" name="Título 1">
-            <a:extLst>
-              <a:ext uri="{FF2B5EF4-FFF2-40B4-BE49-F238E27FC236}">
-                <a16:creationId xmlns:a16="http://schemas.microsoft.com/office/drawing/2014/main" id="{77B13A1C-36B3-624F-40B6-BE0B56C0B1CF}"/>
+          <p:cNvPr id="12" name="Title 1">
+            <a:extLst>
+              <a:ext uri="{FF2B5EF4-FFF2-40B4-BE49-F238E27FC236}">
+                <a16:creationId xmlns:a16="http://schemas.microsoft.com/office/drawing/2014/main" id="{4927495B-63EF-0776-263C-3F0EEAD643ED}"/>
               </a:ext>
             </a:extLst>
           </p:cNvPr>
@@ -5562,24 +5649,118 @@
             <p:ph type="title"/>
           </p:nvPr>
         </p:nvSpPr>
-        <p:spPr/>
+        <p:spPr>
+          <a:xfrm>
+            <a:off x="1165374" y="271526"/>
+            <a:ext cx="10058400" cy="736283"/>
+          </a:xfrm>
+        </p:spPr>
         <p:txBody>
           <a:bodyPr/>
           <a:lstStyle/>
           <a:p>
-            <a:r>
-              <a:rPr lang="es-PA" dirty="0"/>
-              <a:t>Bases de datos</a:t>
-            </a:r>
+            <a:endParaRPr lang="en-US" dirty="0"/>
+          </a:p>
+        </p:txBody>
+      </p:sp>
+      <p:sp>
+        <p:nvSpPr>
+          <p:cNvPr id="14" name="Text Placeholder 2">
+            <a:extLst>
+              <a:ext uri="{FF2B5EF4-FFF2-40B4-BE49-F238E27FC236}">
+                <a16:creationId xmlns:a16="http://schemas.microsoft.com/office/drawing/2014/main" id="{9FB6AFA1-35BD-1F5F-E597-0CAD07789EDE}"/>
+              </a:ext>
+            </a:extLst>
+          </p:cNvPr>
+          <p:cNvSpPr>
+            <a:spLocks noGrp="1"/>
+          </p:cNvSpPr>
+          <p:nvPr>
+            <p:ph type="body" idx="1"/>
+          </p:nvPr>
+        </p:nvSpPr>
+        <p:spPr>
+          <a:xfrm>
+            <a:off x="1097280" y="2057400"/>
+            <a:ext cx="4639736" cy="736282"/>
+          </a:xfrm>
+        </p:spPr>
+        <p:txBody>
+          <a:bodyPr>
+            <a:noAutofit/>
+          </a:bodyPr>
+          <a:lstStyle/>
+          <a:p>
+            <a:r>
+              <a:rPr lang="en-US" sz="1800" dirty="0" err="1"/>
+              <a:t>Boton</a:t>
+            </a:r>
+            <a:r>
+              <a:rPr lang="en-US" sz="1800" dirty="0"/>
+              <a:t> </a:t>
+            </a:r>
+            <a:r>
+              <a:rPr lang="en-US" sz="1800" dirty="0" err="1"/>
+              <a:t>Buscar</a:t>
+            </a:r>
+            <a:r>
+              <a:rPr lang="en-US" sz="1800" dirty="0"/>
+              <a:t>:  lee </a:t>
+            </a:r>
+            <a:r>
+              <a:rPr lang="en-US" sz="1800" dirty="0" err="1"/>
+              <a:t>el</a:t>
+            </a:r>
+            <a:r>
+              <a:rPr lang="en-US" sz="1800" dirty="0"/>
+              <a:t> </a:t>
+            </a:r>
+            <a:r>
+              <a:rPr lang="en-US" sz="1800" dirty="0" err="1"/>
+              <a:t>texto</a:t>
+            </a:r>
+            <a:r>
+              <a:rPr lang="en-US" sz="1800" dirty="0"/>
+              <a:t> del textbox de la </a:t>
+            </a:r>
+            <a:r>
+              <a:rPr lang="en-US" sz="1800" dirty="0" err="1"/>
+              <a:t>pagina</a:t>
+            </a:r>
+            <a:r>
+              <a:rPr lang="en-US" sz="1800" dirty="0"/>
+              <a:t> principal y lo </a:t>
+            </a:r>
+            <a:r>
+              <a:rPr lang="en-US" sz="1800" dirty="0" err="1"/>
+              <a:t>reedirige</a:t>
+            </a:r>
+            <a:r>
+              <a:rPr lang="en-US" sz="1800" dirty="0"/>
+              <a:t> a la </a:t>
+            </a:r>
+            <a:r>
+              <a:rPr lang="en-US" sz="1800" dirty="0" err="1"/>
+              <a:t>pagina</a:t>
+            </a:r>
+            <a:r>
+              <a:rPr lang="en-US" sz="1800" dirty="0"/>
+              <a:t> de </a:t>
+            </a:r>
+            <a:r>
+              <a:rPr lang="en-US" sz="1800" dirty="0" err="1"/>
+              <a:t>pelicula</a:t>
+            </a:r>
+            <a:endParaRPr lang="en-US" sz="1800" dirty="0"/>
           </a:p>
         </p:txBody>
       </p:sp>
       <p:pic>
         <p:nvPicPr>
-          <p:cNvPr id="7" name="Marcador de contenido 6">
-            <a:extLst>
-              <a:ext uri="{FF2B5EF4-FFF2-40B4-BE49-F238E27FC236}">
-                <a16:creationId xmlns:a16="http://schemas.microsoft.com/office/drawing/2014/main" id="{71701DA8-C90D-0349-017B-27E497051A7E}"/>
+          <p:cNvPr id="9" name="Marcador de contenido 8">
+            <a:extLst>
+              <a:ext uri="{FF2B5EF4-FFF2-40B4-BE49-F238E27FC236}">
+                <a16:creationId xmlns:a16="http://schemas.microsoft.com/office/drawing/2014/main" id="{D0667CB9-D9A2-163C-F533-8AE7DEAEAAB3}"/>
               </a:ext>
             </a:extLst>
           </p:cNvPr>
@@ -5587,7 +5768,7 @@
             <a:picLocks noGrp="1" noChangeAspect="1"/>
           </p:cNvPicPr>
           <p:nvPr>
-            <p:ph idx="1"/>
+            <p:ph sz="half" idx="2"/>
           </p:nvPr>
         </p:nvPicPr>
         <p:blipFill>
@@ -5598,8 +5779,8 @@
         </p:blipFill>
         <p:spPr>
           <a:xfrm>
-            <a:off x="5459413" y="1026359"/>
-            <a:ext cx="5927725" cy="4867195"/>
+            <a:off x="0" y="3210129"/>
+            <a:ext cx="6254885" cy="2548646"/>
           </a:xfrm>
           <a:prstGeom prst="rect">
             <a:avLst/>
@@ -5608,38 +5789,81 @@
       </p:pic>
       <p:sp>
         <p:nvSpPr>
-          <p:cNvPr id="4" name="Marcador de texto 3">
-            <a:extLst>
-              <a:ext uri="{FF2B5EF4-FFF2-40B4-BE49-F238E27FC236}">
-                <a16:creationId xmlns:a16="http://schemas.microsoft.com/office/drawing/2014/main" id="{09DAE870-13BD-A2A7-86F0-13B8AE4D34A2}"/>
-              </a:ext>
-            </a:extLst>
-          </p:cNvPr>
-          <p:cNvSpPr>
-            <a:spLocks noGrp="1"/>
-          </p:cNvSpPr>
-          <p:nvPr>
-            <p:ph type="body" sz="half" idx="2"/>
-          </p:nvPr>
-        </p:nvSpPr>
-        <p:spPr/>
-        <p:txBody>
-          <a:bodyPr/>
-          <a:lstStyle/>
-          <a:p>
-            <a:r>
-              <a:rPr lang="es-PA" dirty="0"/>
-              <a:t>Base de datos de películas y series</a:t>
-            </a:r>
-          </a:p>
-        </p:txBody>
-      </p:sp>
+          <p:cNvPr id="18" name="Text Placeholder 4">
+            <a:extLst>
+              <a:ext uri="{FF2B5EF4-FFF2-40B4-BE49-F238E27FC236}">
+                <a16:creationId xmlns:a16="http://schemas.microsoft.com/office/drawing/2014/main" id="{8B1D359C-6544-9783-F86D-64B956AFE760}"/>
+              </a:ext>
+            </a:extLst>
+          </p:cNvPr>
+          <p:cNvSpPr>
+            <a:spLocks noGrp="1"/>
+          </p:cNvSpPr>
+          <p:nvPr>
+            <p:ph type="body" sz="quarter" idx="3"/>
+          </p:nvPr>
+        </p:nvSpPr>
+        <p:spPr>
+          <a:xfrm>
+            <a:off x="6515944" y="2057400"/>
+            <a:ext cx="3513273" cy="900874"/>
+          </a:xfrm>
+        </p:spPr>
+        <p:txBody>
+          <a:bodyPr>
+            <a:normAutofit fontScale="32500" lnSpcReduction="20000"/>
+          </a:bodyPr>
+          <a:lstStyle/>
+          <a:p>
+            <a:r>
+              <a:rPr lang="es-MX" sz="4900" dirty="0"/>
+              <a:t>Cada método Llama a una API, Genera HTML, Inserta imágenes, Guarda en la BD</a:t>
+            </a:r>
+          </a:p>
+          <a:p>
+            <a:endParaRPr lang="en-US" dirty="0"/>
+          </a:p>
+        </p:txBody>
+      </p:sp>
+      <p:pic>
+        <p:nvPicPr>
+          <p:cNvPr id="7" name="Marcador de contenido 6">
+            <a:extLst>
+              <a:ext uri="{FF2B5EF4-FFF2-40B4-BE49-F238E27FC236}">
+                <a16:creationId xmlns:a16="http://schemas.microsoft.com/office/drawing/2014/main" id="{1DB6497D-95E8-2657-3F7A-BF4F7A9565AD}"/>
+              </a:ext>
+            </a:extLst>
+          </p:cNvPr>
+          <p:cNvPicPr>
+            <a:picLocks noGrp="1" noChangeAspect="1"/>
+          </p:cNvPicPr>
+          <p:nvPr>
+            <p:ph sz="quarter" idx="4"/>
+          </p:nvPr>
+        </p:nvPicPr>
+        <p:blipFill>
+          <a:blip r:embed="rId3"/>
+          <a:stretch>
+            <a:fillRect/>
+          </a:stretch>
+        </p:blipFill>
+        <p:spPr>
+          <a:xfrm>
+            <a:off x="6454984" y="2958274"/>
+            <a:ext cx="4639736" cy="2725844"/>
+          </a:xfrm>
+          <a:prstGeom prst="rect">
+            <a:avLst/>
+          </a:prstGeom>
+          <a:noFill/>
+        </p:spPr>
+      </p:pic>
       <p:sp>
         <p:nvSpPr>
           <p:cNvPr id="5" name="Marcador de fecha 4">
             <a:extLst>
               <a:ext uri="{FF2B5EF4-FFF2-40B4-BE49-F238E27FC236}">
-                <a16:creationId xmlns:a16="http://schemas.microsoft.com/office/drawing/2014/main" id="{5B6604EB-AE06-3212-4DD8-1592C838B2DD}"/>
+                <a16:creationId xmlns:a16="http://schemas.microsoft.com/office/drawing/2014/main" id="{E53BC21D-331B-977F-992F-2887BD71285D}"/>
               </a:ext>
             </a:extLst>
           </p:cNvPr>
@@ -5650,24 +5874,40 @@
             <p:ph type="dt" sz="half" idx="10"/>
           </p:nvPr>
         </p:nvSpPr>
-        <p:spPr/>
-        <p:txBody>
-          <a:bodyPr/>
-          <a:lstStyle/>
-          <a:p>
-            <a:pPr rtl="0"/>
-            <a:fld id="{F3EBED02-4679-462C-830F-722888DF8E2D}" type="datetime1">
+        <p:spPr>
+          <a:xfrm>
+            <a:off x="8218426" y="6446838"/>
+            <a:ext cx="2584850" cy="365125"/>
+          </a:xfrm>
+        </p:spPr>
+        <p:txBody>
+          <a:bodyPr anchor="ctr">
+            <a:normAutofit/>
+          </a:bodyPr>
+          <a:lstStyle/>
+          <a:p>
+            <a:pPr rtl="0">
+              <a:spcAft>
+                <a:spcPts val="600"/>
+              </a:spcAft>
+            </a:pPr>
+            <a:fld id="{4E289539-2F87-43AF-8A5D-E992DCF9F593}" type="datetime1">
               <a:rPr lang="es-ES" smtClean="0"/>
+              <a:pPr rtl="0">
+                <a:spcAft>
+                  <a:spcPts val="600"/>
+                </a:spcAft>
+              </a:pPr>
               <a:t>16/12/2025</a:t>
             </a:fld>
-            <a:endParaRPr lang="en-US" dirty="0"/>
+            <a:endParaRPr lang="en-US"/>
           </a:p>
         </p:txBody>
       </p:sp>
     </p:spTree>
     <p:extLst>
       <p:ext uri="{BB962C8B-B14F-4D97-AF65-F5344CB8AC3E}">
-        <p14:creationId xmlns:p14="http://schemas.microsoft.com/office/powerpoint/2010/main" val="1723919694"/>
+        <p14:creationId xmlns:p14="http://schemas.microsoft.com/office/powerpoint/2010/main" val="2730147275"/>
       </p:ext>
     </p:extLst>
   </p:cSld>
@@ -5699,7 +5939,7 @@
           <p:cNvPr id="2" name="Título 1">
             <a:extLst>
               <a:ext uri="{FF2B5EF4-FFF2-40B4-BE49-F238E27FC236}">
-                <a16:creationId xmlns:a16="http://schemas.microsoft.com/office/drawing/2014/main" id="{88D7410A-304B-FD72-A37D-BC4ADEB9F2D8}"/>
+                <a16:creationId xmlns:a16="http://schemas.microsoft.com/office/drawing/2014/main" id="{77B13A1C-36B3-624F-40B6-BE0B56C0B1CF}"/>
               </a:ext>
             </a:extLst>
           </p:cNvPr>
@@ -5717,7 +5957,7 @@
           <a:p>
             <a:r>
               <a:rPr lang="es-PA" dirty="0"/>
-              <a:t>Cargar series</a:t>
+              <a:t>Bases de datos</a:t>
             </a:r>
           </a:p>
         </p:txBody>
@@ -5727,7 +5967,7 @@
           <p:cNvPr id="7" name="Marcador de contenido 6">
             <a:extLst>
               <a:ext uri="{FF2B5EF4-FFF2-40B4-BE49-F238E27FC236}">
-                <a16:creationId xmlns:a16="http://schemas.microsoft.com/office/drawing/2014/main" id="{B62A194D-2C4E-DBB5-2B8B-862722641402}"/>
+                <a16:creationId xmlns:a16="http://schemas.microsoft.com/office/drawing/2014/main" id="{71701DA8-C90D-0349-017B-27E497051A7E}"/>
               </a:ext>
             </a:extLst>
           </p:cNvPr>
@@ -5746,8 +5986,8 @@
         </p:blipFill>
         <p:spPr>
           <a:xfrm>
-            <a:off x="4737371" y="505838"/>
-            <a:ext cx="8958158" cy="6060332"/>
+            <a:off x="5459413" y="1026359"/>
+            <a:ext cx="5927725" cy="4867195"/>
           </a:xfrm>
           <a:prstGeom prst="rect">
             <a:avLst/>
@@ -5759,7 +5999,7 @@
           <p:cNvPr id="4" name="Marcador de texto 3">
             <a:extLst>
               <a:ext uri="{FF2B5EF4-FFF2-40B4-BE49-F238E27FC236}">
-                <a16:creationId xmlns:a16="http://schemas.microsoft.com/office/drawing/2014/main" id="{FA3F5924-041F-00EA-55B3-44570E06DFB1}"/>
+                <a16:creationId xmlns:a16="http://schemas.microsoft.com/office/drawing/2014/main" id="{09DAE870-13BD-A2A7-86F0-13B8AE4D34A2}"/>
               </a:ext>
             </a:extLst>
           </p:cNvPr>
@@ -5776,23 +6016,9 @@
           <a:lstStyle/>
           <a:p>
             <a:r>
-              <a:rPr lang="es-MX" dirty="0"/>
-              <a:t>Busca series en la API de </a:t>
-            </a:r>
-            <a:r>
-              <a:rPr lang="es-MX" dirty="0" err="1"/>
-              <a:t>TVMaze</a:t>
-            </a:r>
-            <a:r>
-              <a:rPr lang="es-MX" dirty="0"/>
-              <a:t>, obtiene sus posters, las guarda en la base de datos y las muestra en la página.</a:t>
-            </a:r>
-          </a:p>
-          <a:p>
-            <a:endParaRPr lang="es-MX" dirty="0"/>
-          </a:p>
-          <a:p>
-            <a:endParaRPr lang="es-PA" dirty="0"/>
+              <a:rPr lang="es-PA" dirty="0"/>
+              <a:t>Base de datos de películas y series</a:t>
+            </a:r>
           </a:p>
         </p:txBody>
       </p:sp>
@@ -5801,7 +6027,7 @@
           <p:cNvPr id="5" name="Marcador de fecha 4">
             <a:extLst>
               <a:ext uri="{FF2B5EF4-FFF2-40B4-BE49-F238E27FC236}">
-                <a16:creationId xmlns:a16="http://schemas.microsoft.com/office/drawing/2014/main" id="{E775D1EE-20B7-03E0-30FB-00F205367412}"/>
+                <a16:creationId xmlns:a16="http://schemas.microsoft.com/office/drawing/2014/main" id="{5B6604EB-AE06-3212-4DD8-1592C838B2DD}"/>
               </a:ext>
             </a:extLst>
           </p:cNvPr>
@@ -5829,7 +6055,7 @@
     </p:spTree>
     <p:extLst>
       <p:ext uri="{BB962C8B-B14F-4D97-AF65-F5344CB8AC3E}">
-        <p14:creationId xmlns:p14="http://schemas.microsoft.com/office/powerpoint/2010/main" val="3445233124"/>
+        <p14:creationId xmlns:p14="http://schemas.microsoft.com/office/powerpoint/2010/main" val="1723919694"/>
       </p:ext>
     </p:extLst>
   </p:cSld>
@@ -5861,7 +6087,7 @@
           <p:cNvPr id="2" name="Título 1">
             <a:extLst>
               <a:ext uri="{FF2B5EF4-FFF2-40B4-BE49-F238E27FC236}">
-                <a16:creationId xmlns:a16="http://schemas.microsoft.com/office/drawing/2014/main" id="{46B68DC4-2274-A0DA-0EB9-8B05159111F1}"/>
+                <a16:creationId xmlns:a16="http://schemas.microsoft.com/office/drawing/2014/main" id="{88D7410A-304B-FD72-A37D-BC4ADEB9F2D8}"/>
               </a:ext>
             </a:extLst>
           </p:cNvPr>
@@ -5879,12 +6105,8 @@
           <a:p>
             <a:r>
               <a:rPr lang="es-PA" dirty="0"/>
-              <a:t>Funciones de cargar películas</a:t>
-            </a:r>
-            <a:br>
-              <a:rPr lang="es-PA" dirty="0"/>
-            </a:br>
-            <a:endParaRPr lang="es-PA" dirty="0"/>
+              <a:t>Cargar series</a:t>
+            </a:r>
           </a:p>
         </p:txBody>
       </p:sp>
@@ -5893,7 +6115,7 @@
           <p:cNvPr id="7" name="Marcador de contenido 6">
             <a:extLst>
               <a:ext uri="{FF2B5EF4-FFF2-40B4-BE49-F238E27FC236}">
-                <a16:creationId xmlns:a16="http://schemas.microsoft.com/office/drawing/2014/main" id="{8E75A7AA-DFB5-A47E-1513-2F29F4FC3CDA}"/>
+                <a16:creationId xmlns:a16="http://schemas.microsoft.com/office/drawing/2014/main" id="{B62A194D-2C4E-DBB5-2B8B-862722641402}"/>
               </a:ext>
             </a:extLst>
           </p:cNvPr>
@@ -5912,8 +6134,8 @@
         </p:blipFill>
         <p:spPr>
           <a:xfrm>
-            <a:off x="4708187" y="0"/>
-            <a:ext cx="8622590" cy="6811645"/>
+            <a:off x="4737371" y="505838"/>
+            <a:ext cx="8958158" cy="6060332"/>
           </a:xfrm>
           <a:prstGeom prst="rect">
             <a:avLst/>
@@ -5925,7 +6147,7 @@
           <p:cNvPr id="4" name="Marcador de texto 3">
             <a:extLst>
               <a:ext uri="{FF2B5EF4-FFF2-40B4-BE49-F238E27FC236}">
-                <a16:creationId xmlns:a16="http://schemas.microsoft.com/office/drawing/2014/main" id="{410CD9A2-1C3A-97A2-BA22-B4309EE829D5}"/>
+                <a16:creationId xmlns:a16="http://schemas.microsoft.com/office/drawing/2014/main" id="{FA3F5924-041F-00EA-55B3-44570E06DFB1}"/>
               </a:ext>
             </a:extLst>
           </p:cNvPr>
@@ -5942,21 +6164,22 @@
           <a:lstStyle/>
           <a:p>
             <a:r>
-              <a:rPr lang="es-MX" b="1" dirty="0"/>
-              <a:t>preparan los datos</a:t>
-            </a:r>
-            <a:r>
               <a:rPr lang="es-MX" dirty="0"/>
-              <a:t> y llaman a un método general (</a:t>
+              <a:t>Busca series en la API de </a:t>
             </a:r>
             <a:r>
               <a:rPr lang="es-MX" dirty="0" err="1"/>
-              <a:t>CargarPeliculas</a:t>
+              <a:t>TVMaze</a:t>
             </a:r>
             <a:r>
               <a:rPr lang="es-MX" dirty="0"/>
-              <a:t>)</a:t>
-            </a:r>
+              <a:t>, obtiene sus posters, las guarda en la base de datos y las muestra en la página.</a:t>
+            </a:r>
+          </a:p>
+          <a:p>
+            <a:endParaRPr lang="es-MX" dirty="0"/>
+          </a:p>
+          <a:p>
             <a:endParaRPr lang="es-PA" dirty="0"/>
           </a:p>
         </p:txBody>
@@ -5966,7 +6189,7 @@
           <p:cNvPr id="5" name="Marcador de fecha 4">
             <a:extLst>
               <a:ext uri="{FF2B5EF4-FFF2-40B4-BE49-F238E27FC236}">
-                <a16:creationId xmlns:a16="http://schemas.microsoft.com/office/drawing/2014/main" id="{DEDC89E9-8A47-2800-43C3-708E595FBA64}"/>
+                <a16:creationId xmlns:a16="http://schemas.microsoft.com/office/drawing/2014/main" id="{E775D1EE-20B7-03E0-30FB-00F205367412}"/>
               </a:ext>
             </a:extLst>
           </p:cNvPr>
@@ -5994,7 +6217,7 @@
     </p:spTree>
     <p:extLst>
       <p:ext uri="{BB962C8B-B14F-4D97-AF65-F5344CB8AC3E}">
-        <p14:creationId xmlns:p14="http://schemas.microsoft.com/office/powerpoint/2010/main" val="220802378"/>
+        <p14:creationId xmlns:p14="http://schemas.microsoft.com/office/powerpoint/2010/main" val="3445233124"/>
       </p:ext>
     </p:extLst>
   </p:cSld>
@@ -6026,7 +6249,7 @@
           <p:cNvPr id="2" name="Título 1">
             <a:extLst>
               <a:ext uri="{FF2B5EF4-FFF2-40B4-BE49-F238E27FC236}">
-                <a16:creationId xmlns:a16="http://schemas.microsoft.com/office/drawing/2014/main" id="{A9835384-678E-7099-FA05-272972EEF36A}"/>
+                <a16:creationId xmlns:a16="http://schemas.microsoft.com/office/drawing/2014/main" id="{46B68DC4-2274-A0DA-0EB9-8B05159111F1}"/>
               </a:ext>
             </a:extLst>
           </p:cNvPr>
@@ -6044,8 +6267,12 @@
           <a:p>
             <a:r>
               <a:rPr lang="es-PA" dirty="0"/>
-              <a:t>Favoritos</a:t>
-            </a:r>
+              <a:t>Funciones de cargar películas</a:t>
+            </a:r>
+            <a:br>
+              <a:rPr lang="es-PA" dirty="0"/>
+            </a:br>
+            <a:endParaRPr lang="es-PA" dirty="0"/>
           </a:p>
         </p:txBody>
       </p:sp>
@@ -6054,7 +6281,7 @@
           <p:cNvPr id="7" name="Marcador de contenido 6">
             <a:extLst>
               <a:ext uri="{FF2B5EF4-FFF2-40B4-BE49-F238E27FC236}">
-                <a16:creationId xmlns:a16="http://schemas.microsoft.com/office/drawing/2014/main" id="{63E5EB2E-57D3-483D-607F-AC8220499BD7}"/>
+                <a16:creationId xmlns:a16="http://schemas.microsoft.com/office/drawing/2014/main" id="{8E75A7AA-DFB5-A47E-1513-2F29F4FC3CDA}"/>
               </a:ext>
             </a:extLst>
           </p:cNvPr>
@@ -6073,8 +6300,8 @@
         </p:blipFill>
         <p:spPr>
           <a:xfrm>
-            <a:off x="5459413" y="984297"/>
-            <a:ext cx="5927725" cy="4951319"/>
+            <a:off x="4708187" y="0"/>
+            <a:ext cx="8622590" cy="6811645"/>
           </a:xfrm>
           <a:prstGeom prst="rect">
             <a:avLst/>
@@ -6086,7 +6313,7 @@
           <p:cNvPr id="4" name="Marcador de texto 3">
             <a:extLst>
               <a:ext uri="{FF2B5EF4-FFF2-40B4-BE49-F238E27FC236}">
-                <a16:creationId xmlns:a16="http://schemas.microsoft.com/office/drawing/2014/main" id="{ECF798A6-46B9-D262-6794-FADCEDFE96B3}"/>
+                <a16:creationId xmlns:a16="http://schemas.microsoft.com/office/drawing/2014/main" id="{410CD9A2-1C3A-97A2-BA22-B4309EE829D5}"/>
               </a:ext>
             </a:extLst>
           </p:cNvPr>
@@ -6103,13 +6330,22 @@
           <a:lstStyle/>
           <a:p>
             <a:r>
-              <a:rPr lang="es-PA" dirty="0" err="1"/>
-              <a:t>Select</a:t>
-            </a:r>
-            <a:r>
-              <a:rPr lang="es-PA" dirty="0"/>
-              <a:t> * desde la base de datos favoritos para mostrar en la pagina web</a:t>
-            </a:r>
+              <a:rPr lang="es-MX" b="1" dirty="0"/>
+              <a:t>preparan los datos</a:t>
+            </a:r>
+            <a:r>
+              <a:rPr lang="es-MX" dirty="0"/>
+              <a:t> y llaman a un método general (</a:t>
+            </a:r>
+            <a:r>
+              <a:rPr lang="es-MX" dirty="0" err="1"/>
+              <a:t>CargarPeliculas</a:t>
+            </a:r>
+            <a:r>
+              <a:rPr lang="es-MX" dirty="0"/>
+              <a:t>)</a:t>
+            </a:r>
+            <a:endParaRPr lang="es-PA" dirty="0"/>
           </a:p>
         </p:txBody>
       </p:sp>
@@ -6118,7 +6354,7 @@
           <p:cNvPr id="5" name="Marcador de fecha 4">
             <a:extLst>
               <a:ext uri="{FF2B5EF4-FFF2-40B4-BE49-F238E27FC236}">
-                <a16:creationId xmlns:a16="http://schemas.microsoft.com/office/drawing/2014/main" id="{E4799A73-3F8C-82C3-8513-19B1F17978C0}"/>
+                <a16:creationId xmlns:a16="http://schemas.microsoft.com/office/drawing/2014/main" id="{DEDC89E9-8A47-2800-43C3-708E595FBA64}"/>
               </a:ext>
             </a:extLst>
           </p:cNvPr>
@@ -6146,7 +6382,7 @@
     </p:spTree>
     <p:extLst>
       <p:ext uri="{BB962C8B-B14F-4D97-AF65-F5344CB8AC3E}">
-        <p14:creationId xmlns:p14="http://schemas.microsoft.com/office/powerpoint/2010/main" val="49182863"/>
+        <p14:creationId xmlns:p14="http://schemas.microsoft.com/office/powerpoint/2010/main" val="220802378"/>
       </p:ext>
     </p:extLst>
   </p:cSld>
